--- a/docs/GetFast-EK1.pptx
+++ b/docs/GetFast-EK1.pptx
@@ -477,7 +477,7 @@
           </a:p>
           <a:p xmlns:a="http://schemas.openxmlformats.org/drawingml/2006/main">
             <a:r>
-              <a:t>&gt; Показываю GET /health. Если база доступна, сервер возвращает HTTP 200 и status healthy. Отрицательные проверки также предусмотрены: при недоступной базе ответ 503, без пароля или строки подключения в ответе. Документы пока описывают будущие защитные механизмы. Успешный health не доказывает защиту отправлений или кода получения.</a:t>
+              <a:t>&gt; Показываю GET /health. Если база доступна, сервер возвращает HTTP 200 и status healthy. Отрицательные проверки также предусмотрены: при недоступной базе ответ 503, без пароля или строки подключения в ответе. Уже реализованы вход с JWT, серверные роли и запрет по умолчанию — часть D-02. Основные сценарии доставки, D-01 и D-03 пока планируются. Успешный health не доказывает защиту отправлений или кода получения.</a:t>
             </a:r>
           </a:p>
           <a:p xmlns:a="http://schemas.openxmlformats.org/drawingml/2006/main">
@@ -512,7 +512,7 @@
           </a:p>
           <a:p xmlns:a="http://schemas.openxmlformats.org/drawingml/2006/main">
             <a:r>
-              <a:t>Источник: https://github.com/Xausdorf/rbpo-georgik/blob/af43c8c0701808edf897b8919842f9b3e0892249/PROJECT.md</a:t>
+              <a:t>Источники: PROJECT.md и docs/ek1-defense.md в версии этой презентации.</a:t>
             </a:r>
           </a:p>
         </p:txBody>
@@ -612,7 +612,7 @@
           </a:p>
           <a:p xmlns:a="http://schemas.openxmlformats.org/drawingml/2006/main">
             <a:r>
-              <a:t>&gt; Показываю GET /health. Если база доступна, сервер возвращает HTTP 200 и status healthy. Отрицательные проверки также предусмотрены: при недоступной базе ответ 503, без пароля или строки подключения в ответе. Документы пока описывают будущие защитные механизмы. Успешный health не доказывает защиту отправлений или кода получения.</a:t>
+              <a:t>&gt; Показываю GET /health. Если база доступна, сервер возвращает HTTP 200 и status healthy. Отрицательные проверки также предусмотрены: при недоступной базе ответ 503, без пароля или строки подключения в ответе. Уже реализованы вход с JWT, серверные роли и запрет по умолчанию — часть D-02. Основные сценарии доставки, D-01 и D-03 пока планируются. Успешный health не доказывает защиту отправлений или кода получения.</a:t>
             </a:r>
           </a:p>
           <a:p xmlns:a="http://schemas.openxmlformats.org/drawingml/2006/main">
@@ -642,12 +642,12 @@
           </a:p>
           <a:p xmlns:a="http://schemas.openxmlformats.org/drawingml/2006/main">
             <a:r>
-              <a:t>Слайд 2: 45 секунд, включая запрос /health. Исходный код каркаса проверен на af43c8c0701808edf897b8919842f9b3e0892249.</a:t>
-            </a:r>
-          </a:p>
-          <a:p xmlns:a="http://schemas.openxmlformats.org/drawingml/2006/main">
-            <a:r>
-              <a:t>Источники: README и docs/ek1-verification.md в ветке m3/ek1-readiness. Открытый PR M1/auth-roles не включён в эту проверку.</a:t>
+              <a:t>Слайд 2: 45 секунд, включая запрос /health. На e6e9ee5a1117667892308fccfbc01659aec49b68 подтверждены сборка, шесть тестов конфигурации и согласованность EF-модели с миграцией. Полный прогон и контейнерное демо от 05.10 не выполнены из-за сбоя Docker; перед защитой повторить демо на сдаваемой версии.</a:t>
+            </a:r>
+          </a:p>
+          <a:p xmlns:a="http://schemas.openxmlformats.org/drawingml/2006/main">
+            <a:r>
+              <a:t>Источники: README и docs/ek1-verification.md в версии этой презентации. Прогон семи тестов на af43c8c — исторический, до PR №2; вход и роли из этого PR уже включены в main.</a:t>
             </a:r>
           </a:p>
         </p:txBody>
@@ -997,7 +997,7 @@
           </a:p>
           <a:p xmlns:a="http://schemas.openxmlformats.org/drawingml/2006/main">
             <a:r>
-              <a:t>&gt; Контрпример: если разрешить показывать код в карточке постоянно, сервер должен хранить его в восстановимом виде. Ошибка ответа диспетчеру раскрыла бы действующие коды. Поэтому мы сравнили шифрование с одноразовым показом и выбрали второй вариант, приняв неудобство перевыпуска.</a:t>
+              <a:t>&gt; Контрпример: для постоянного показа кода сервер расшифровывает его для владельца. Если разработчик добавит открытый код в общую модель карточки и вернёт эту модель диспетчеру, код утечёт, хотя в базе он зашифрован. Одна копия базы без ключа его не раскрывает. Мы выбрали HMAC с одноразовым показом, убрав повторную расшифровку для карточки и приняв неудобство перевыпуска.</a:t>
             </a:r>
           </a:p>
           <a:p xmlns:a="http://schemas.openxmlformats.org/drawingml/2006/main">
@@ -1122,7 +1122,7 @@
           </a:p>
           <a:p xmlns:a="http://schemas.openxmlformats.org/drawingml/2006/main">
             <a:r>
-              <a:t>&gt; Контрпример: если разрешить показывать код в карточке постоянно, сервер должен хранить его в восстановимом виде. Ошибка ответа диспетчеру раскрыла бы действующие коды. Поэтому мы сравнили шифрование с одноразовым показом и выбрали второй вариант, приняв неудобство перевыпуска.</a:t>
+              <a:t>&gt; Контрпример: для постоянного показа кода сервер расшифровывает его для владельца. Если разработчик добавит открытый код в общую модель карточки и вернёт эту модель диспетчеру, код утечёт, хотя в базе он зашифрован. Одна копия базы без ключа его не раскрывает. Мы выбрали HMAC с одноразовым показом, убрав повторную расшифровку для карточки и приняв неудобство перевыпуска.</a:t>
             </a:r>
           </a:p>
           <a:p xmlns:a="http://schemas.openxmlformats.org/drawingml/2006/main">
@@ -2504,7 +2504,7 @@
                 <a:ea typeface="Helvetica Neue"/>
                 <a:cs typeface="Helvetica Neue"/>
               </a:rPr>
-              <a:t>Сборка без ошибок. 7 тестов прошли.</a:t>
+              <a:t>Identity / JWT / серверные роли.</a:t>
             </a:r>
           </a:p>
           <a:p xmlns:a="http://schemas.openxmlformats.org/drawingml/2006/main">
@@ -2527,7 +2527,7 @@
                 <a:ea typeface="Helvetica Neue"/>
                 <a:cs typeface="Helvetica Neue"/>
               </a:rPr>
-              <a:t>D-01–D-03 пока описаны как план.</a:t>
+              <a:t>D-01 и D-03 пока планируются.</a:t>
             </a:r>
           </a:p>
         </p:txBody>
@@ -4194,7 +4194,7 @@
                 <a:ea typeface="Helvetica Neue"/>
                 <a:cs typeface="Helvetica Neue"/>
               </a:rPr>
-              <a:t>Нужен восстановимый код.</a:t>
+              <a:t>Расшифровка для показа.</a:t>
             </a:r>
           </a:p>
           <a:p xmlns:a="http://schemas.openxmlformats.org/drawingml/2006/main">
@@ -4217,7 +4217,7 @@
                 <a:ea typeface="Helvetica Neue"/>
                 <a:cs typeface="Helvetica Neue"/>
               </a:rPr>
-              <a:t>Ошибка карточки может</a:t>
+              <a:t>Общий ответ персоналу</a:t>
             </a:r>
           </a:p>
           <a:p xmlns:a="http://schemas.openxmlformats.org/drawingml/2006/main">
@@ -4240,7 +4240,7 @@
                 <a:ea typeface="Helvetica Neue"/>
                 <a:cs typeface="Helvetica Neue"/>
               </a:rPr>
-              <a:t>раскрыть действующие коды.</a:t>
+              <a:t>раскрывает открытый код.</a:t>
             </a:r>
           </a:p>
         </p:txBody>

--- a/docs/GetFast-EK1.pptx
+++ b/docs/GetFast-EK1.pptx
@@ -163,9 +163,9 @@
 </file>
 
 <file path=ppt/notesMasters/theme/theme3.xml><?xml version="1.0" encoding="utf-8"?>
-<a:theme xmlns:a="http://schemas.openxmlformats.org/drawingml/2006/main" name="ChatGPT">
+<a:theme xmlns:a="http://schemas.openxmlformats.org/drawingml/2006/main" name="GetFast">
   <a:themeElements>
-    <a:clrScheme name="ChatGPT">
+    <a:clrScheme name="GetFast">
       <a:dk1>
         <a:srgbClr val="000000"/>
       </a:dk1>
@@ -215,7 +215,7 @@
         <a:cs typeface="Calibri"/>
       </a:minorFont>
     </a:fontScheme>
-    <a:fmtScheme name="ChatGPT">
+    <a:fmtScheme name="GetFast">
       <a:fillStyleLst>
         <a:solidFill>
           <a:schemeClr val="phClr"/>
@@ -477,7 +477,7 @@
           </a:p>
           <a:p xmlns:a="http://schemas.openxmlformats.org/drawingml/2006/main">
             <a:r>
-              <a:t>&gt; Показываю GET /health. Если база доступна, сервер возвращает HTTP 200 и status healthy. Отрицательные проверки также предусмотрены: при недоступной базе ответ 503, без пароля или строки подключения в ответе. Документы пока описывают будущие защитные механизмы. Успешный health не доказывает защиту отправлений или кода получения.</a:t>
+              <a:t>&gt; Показываю GET /health. Если база доступна, сервер возвращает HTTP 200 и status healthy. Отрицательные проверки также предусмотрены: при недоступной базе ответ 503, без пароля или строки подключения в ответе. Уже реализованы вход с JWT, серверные роли и запрет по умолчанию — часть D-02. Основные сценарии доставки, D-01 и D-03 пока планируются. Успешный health не доказывает защиту отправлений или кода получения.</a:t>
             </a:r>
           </a:p>
           <a:p xmlns:a="http://schemas.openxmlformats.org/drawingml/2006/main">
@@ -512,7 +512,7 @@
           </a:p>
           <a:p xmlns:a="http://schemas.openxmlformats.org/drawingml/2006/main">
             <a:r>
-              <a:t>Источник: https://github.com/Xausdorf/rbpo-georgik/blob/bfbadec6e6d7588e0e58f7a24a2656b4ebfa9e3e/PROJECT.md</a:t>
+              <a:t>Источники: PROJECT.md и docs/ek1-defense.md в версии этой презентации.</a:t>
             </a:r>
           </a:p>
         </p:txBody>
@@ -612,7 +612,7 @@
           </a:p>
           <a:p xmlns:a="http://schemas.openxmlformats.org/drawingml/2006/main">
             <a:r>
-              <a:t>&gt; Показываю GET /health. Если база доступна, сервер возвращает HTTP 200 и status healthy. Отрицательные проверки также предусмотрены: при недоступной базе ответ 503, без пароля или строки подключения в ответе. Документы пока описывают будущие защитные механизмы. Успешный health не доказывает защиту отправлений или кода получения.</a:t>
+              <a:t>&gt; Показываю GET /health. Если база доступна, сервер возвращает HTTP 200 и status healthy. Отрицательные проверки также предусмотрены: при недоступной базе ответ 503, без пароля или строки подключения в ответе. Уже реализованы вход с JWT, серверные роли и запрет по умолчанию — часть D-02. Основные сценарии доставки, D-01 и D-03 пока планируются. Успешный health не доказывает защиту отправлений или кода получения.</a:t>
             </a:r>
           </a:p>
           <a:p xmlns:a="http://schemas.openxmlformats.org/drawingml/2006/main">
@@ -642,12 +642,12 @@
           </a:p>
           <a:p xmlns:a="http://schemas.openxmlformats.org/drawingml/2006/main">
             <a:r>
-              <a:t>Слайд 2: 45 секунд, включая запрос /health. Исходный код каркаса проверен на bfbadec6e6d7588e0e58f7a24a2656b4ebfa9e3e.</a:t>
-            </a:r>
-          </a:p>
-          <a:p xmlns:a="http://schemas.openxmlformats.org/drawingml/2006/main">
-            <a:r>
-              <a:t>Источники: README и docs/ek1-verification.md в ветке m3/ek1-readiness. Открытый PR M1/auth-roles не включён в эту проверку.</a:t>
+              <a:t>Слайд 2: 45 секунд, включая запрос /health. На 8bd283035fb4ebfa4d09863ce44514b154506be2 подтверждены сборка, шесть тестов конфигурации и согласованность EF-модели с миграцией. Полный прогон и контейнерное демо от 05.10 не выполнены из-за сбоя Docker; перед защитой повторить демо на сдаваемой версии.</a:t>
+            </a:r>
+          </a:p>
+          <a:p xmlns:a="http://schemas.openxmlformats.org/drawingml/2006/main">
+            <a:r>
+              <a:t>Источники: README и docs/ek1-verification.md в версии этой презентации. Прогон семи тестов на bfbadec — исторический, до PR №2; вход и роли из этого PR уже включены в main.</a:t>
             </a:r>
           </a:p>
         </p:txBody>
@@ -997,7 +997,7 @@
           </a:p>
           <a:p xmlns:a="http://schemas.openxmlformats.org/drawingml/2006/main">
             <a:r>
-              <a:t>&gt; Контрпример: если разрешить показывать код в карточке постоянно, сервер должен хранить его в восстановимом виде. Ошибка ответа диспетчеру раскрыла бы действующие коды. Поэтому мы сравнили шифрование с одноразовым показом и выбрали второй вариант, приняв неудобство перевыпуска.</a:t>
+              <a:t>&gt; Контрпример: для постоянного показа кода сервер расшифровывает его для владельца. Если разработчик добавит открытый код в общую модель карточки и вернёт эту модель диспетчеру, код утечёт, хотя в базе он зашифрован. Одна копия базы без ключа его не раскрывает. Мы выбрали HMAC с одноразовым показом, убрав повторную расшифровку для карточки и приняв неудобство перевыпуска.</a:t>
             </a:r>
           </a:p>
           <a:p xmlns:a="http://schemas.openxmlformats.org/drawingml/2006/main">
@@ -1122,7 +1122,7 @@
           </a:p>
           <a:p xmlns:a="http://schemas.openxmlformats.org/drawingml/2006/main">
             <a:r>
-              <a:t>&gt; Контрпример: если разрешить показывать код в карточке постоянно, сервер должен хранить его в восстановимом виде. Ошибка ответа диспетчеру раскрыла бы действующие коды. Поэтому мы сравнили шифрование с одноразовым показом и выбрали второй вариант, приняв неудобство перевыпуска.</a:t>
+              <a:t>&gt; Контрпример: для постоянного показа кода сервер расшифровывает его для владельца. Если разработчик добавит открытый код в общую модель карточки и вернёт эту модель диспетчеру, код утечёт, хотя в базе он зашифрован. Одна копия базы без ключа его не раскрывает. Мы выбрали HMAC с одноразовым показом, убрав повторную расшифровку для карточки и приняв неудобство перевыпуска.</a:t>
             </a:r>
           </a:p>
           <a:p xmlns:a="http://schemas.openxmlformats.org/drawingml/2006/main">
@@ -1498,9 +1498,9 @@
 </file>
 
 <file path=ppt/slideMasters/theme/theme2.xml><?xml version="1.0" encoding="utf-8"?>
-<a:theme xmlns:a="http://schemas.openxmlformats.org/drawingml/2006/main" name="ChatGPT">
+<a:theme xmlns:a="http://schemas.openxmlformats.org/drawingml/2006/main" name="GetFast">
   <a:themeElements>
-    <a:clrScheme name="ChatGPT">
+    <a:clrScheme name="GetFast">
       <a:dk1>
         <a:srgbClr val="000000"/>
       </a:dk1>
@@ -1550,7 +1550,7 @@
         <a:cs typeface="Calibri"/>
       </a:minorFont>
     </a:fontScheme>
-    <a:fmtScheme name="ChatGPT">
+    <a:fmtScheme name="GetFast">
       <a:fillStyleLst>
         <a:solidFill>
           <a:schemeClr val="phClr"/>
@@ -2504,7 +2504,7 @@
                 <a:ea typeface="Helvetica Neue"/>
                 <a:cs typeface="Helvetica Neue"/>
               </a:rPr>
-              <a:t>Сборка без ошибок. 7 тестов прошли.</a:t>
+              <a:t>Identity / JWT / серверные роли.</a:t>
             </a:r>
           </a:p>
           <a:p xmlns:a="http://schemas.openxmlformats.org/drawingml/2006/main">
@@ -2527,7 +2527,7 @@
                 <a:ea typeface="Helvetica Neue"/>
                 <a:cs typeface="Helvetica Neue"/>
               </a:rPr>
-              <a:t>D-01–D-03 пока описаны как план.</a:t>
+              <a:t>D-01 и D-03 пока планируются.</a:t>
             </a:r>
           </a:p>
         </p:txBody>
@@ -4194,7 +4194,7 @@
                 <a:ea typeface="Helvetica Neue"/>
                 <a:cs typeface="Helvetica Neue"/>
               </a:rPr>
-              <a:t>Нужен восстановимый код.</a:t>
+              <a:t>Расшифровка для показа.</a:t>
             </a:r>
           </a:p>
           <a:p xmlns:a="http://schemas.openxmlformats.org/drawingml/2006/main">
@@ -4217,7 +4217,7 @@
                 <a:ea typeface="Helvetica Neue"/>
                 <a:cs typeface="Helvetica Neue"/>
               </a:rPr>
-              <a:t>Ошибка карточки может</a:t>
+              <a:t>Общий ответ персоналу</a:t>
             </a:r>
           </a:p>
           <a:p xmlns:a="http://schemas.openxmlformats.org/drawingml/2006/main">
@@ -4240,7 +4240,7 @@
                 <a:ea typeface="Helvetica Neue"/>
                 <a:cs typeface="Helvetica Neue"/>
               </a:rPr>
-              <a:t>раскрыть действующие коды.</a:t>
+              <a:t>раскрывает открытый код.</a:t>
             </a:r>
           </a:p>
         </p:txBody>
@@ -4576,9 +4576,9 @@
 </file>
 
 <file path=ppt/theme/theme1.xml><?xml version="1.0" encoding="utf-8"?>
-<a:theme xmlns:a="http://schemas.openxmlformats.org/drawingml/2006/main" name="ChatGPT">
+<a:theme xmlns:a="http://schemas.openxmlformats.org/drawingml/2006/main" name="GetFast">
   <a:themeElements>
-    <a:clrScheme name="ChatGPT">
+    <a:clrScheme name="GetFast">
       <a:dk1>
         <a:srgbClr val="000000"/>
       </a:dk1>
@@ -4628,7 +4628,7 @@
         <a:cs typeface="Calibri"/>
       </a:minorFont>
     </a:fontScheme>
-    <a:fmtScheme name="ChatGPT">
+    <a:fmtScheme name="GetFast">
       <a:fillStyleLst>
         <a:solidFill>
           <a:schemeClr val="phClr"/>
